--- a/outputs/presentation_final.pptx
+++ b/outputs/presentation_final.pptx
@@ -3850,7 +3850,7 @@
                 </a:solidFill>
                 <a:latin typeface="Apple SD Gothic Neo"/>
               </a:rPr>
-              <a:t>[근거] 경북 1권역 조사에 따르면 병원/의원 이용 비율은 62.3%라고 합니다.</a:t>
+              <a:t>[근거] 경북 전체 조사에 따르면 병원/의원 이용 비율은 62.3%라고 합니다.</a:t>
             </a:r>
           </a:p>
           <a:p>
@@ -8365,7 +8365,7 @@
                 </a:solidFill>
                 <a:latin typeface="Apple SD Gothic Neo"/>
               </a:rPr>
-              <a:t>어느 쪽을 더 크게 볼 근거가 없어 같게 둠 (GM 검수)</a:t>
+              <a:t>검토 전 중립 기본값 · 민감도 분석으로 함께 확인</a:t>
             </a:r>
           </a:p>
         </p:txBody>
@@ -8912,7 +8912,7 @@
                 </a:solidFill>
                 <a:latin typeface="Apple SD Gothic Neo"/>
               </a:rPr>
-              <a:t>GM 검수</a:t>
+              <a:t>GM 검토 예정</a:t>
             </a:r>
           </a:p>
         </p:txBody>
@@ -12720,7 +12720,7 @@
                 </a:solidFill>
                 <a:latin typeface="Apple SD Gothic Neo"/>
               </a:rPr>
-              <a:t>· 가중치 설계·검수</a:t>
+              <a:t>· 가중치 검토 예정</a:t>
             </a:r>
           </a:p>
           <a:p>
@@ -12736,7 +12736,7 @@
                 </a:solidFill>
                 <a:latin typeface="Apple SD Gothic Neo"/>
               </a:rPr>
-              <a:t>· 정책 타당성 검토</a:t>
+              <a:t>· 정책 타당성 검토 예정</a:t>
             </a:r>
           </a:p>
         </p:txBody>
@@ -12784,7 +12784,7 @@
                 </a:solidFill>
                 <a:latin typeface="Apple SD Gothic Neo"/>
               </a:rPr>
-              <a:t>정책 전공이 검토</a:t>
+              <a:t>정책 전공이 검토할</a:t>
             </a:r>
             <a:r>
               <a:rPr sz="1600" b="0">
@@ -12793,7 +12793,7 @@
                 </a:solidFill>
                 <a:latin typeface="Apple SD Gothic Neo"/>
               </a:rPr>
-              <a:t>하는 구조로 역할을 나눴습니다</a:t>
+              <a:t> 계획입니다 · 실제 검토 기록은 아직 필요합니다</a:t>
             </a:r>
           </a:p>
         </p:txBody>
